--- a/week-05/presentations/ppts/day-01-database-structures-data-logic.pptx
+++ b/week-05/presentations/ppts/day-01-database-structures-data-logic.pptx
@@ -5352,6 +5352,29 @@
           <a:bodyPr/>
           <a:lstStyle/>
           <a:p>
+            <a:pPr lvl="0" indent="0">
+              <a:buNone/>
+            </a:pPr>
+            <a:r>
+              <a:rPr>
+                <a:latin typeface="Courier"/>
+              </a:rPr>
+              <a:t>## Entity: &lt;Name&gt;
+| Field | Type | Notes |
+|-------|------|-------|
+| id    | UUID | Primary key |
+| ...   | ...  | NOT NULL? UNIQUE? FK to ...? |
+**Indexes:**
+- (field, field) — purpose: query #N from access patterns
+**Relationships:**
+- belongs_to &lt;Entity&gt; via &lt;fk_field&gt;
+- has_many &lt;Entity&gt; via &lt;fk_field&gt;
+**Notes / invariants:**
+- A reconcile_event is immutable once created.
+- ticket.status ∈ {open, reconciled, voided}.</a:t>
+            </a:r>
+          </a:p>
+          <a:p>
             <a:pPr lvl="0" indent="0" marL="0">
               <a:buNone/>
             </a:pPr>
@@ -5405,6 +5428,50 @@
             <a:r>
               <a:rPr/>
               <a:t>📝 Worked Entity (FieldPulse)</a:t>
+            </a:r>
+          </a:p>
+        </p:txBody>
+      </p:sp>
+      <p:sp>
+        <p:nvSpPr>
+          <p:cNvPr id="3" name="Content Placeholder 2"/>
+          <p:cNvSpPr>
+            <a:spLocks noGrp="1"/>
+          </p:cNvSpPr>
+          <p:nvPr>
+            <p:ph idx="1"/>
+          </p:nvPr>
+        </p:nvSpPr>
+        <p:spPr/>
+        <p:txBody>
+          <a:bodyPr/>
+          <a:lstStyle/>
+          <a:p>
+            <a:pPr lvl="0" indent="0">
+              <a:buNone/>
+            </a:pPr>
+            <a:r>
+              <a:rPr>
+                <a:latin typeface="Courier"/>
+              </a:rPr>
+              <a:t>## Entity: ReconcileEvent
+| Field | Type | Notes |
+|-------|------|-------|
+| id | UUID | PK |
+| dispatcher_id | UUID | FK → Dispatcher |
+| ticket_ids | UUID[] | The set reconciled (denormalized) |
+| submitted_at | timestamp | NOT NULL |
+| client_ip | inet | for audit |
+| user_agent | text | for audit |
+| signature_hash | text | for non-repudiation (R-threat) |
+**Indexes:**
+- (dispatcher_id, submitted_at DESC) — serves pattern #4 (history)
+- (submitted_at) — serves pattern #3 (audit-trail range query)
+**Relationships:**
+- belongs_to Dispatcher via dispatcher_id
+**Invariants:**
+- Immutable: never UPDATE'd after INSERT
+- ticket_ids is denormalized (see trade-off #2)</a:t>
             </a:r>
           </a:p>
         </p:txBody>

--- a/week-05/presentations/ppts/day-01-database-structures-data-logic.pptx
+++ b/week-05/presentations/ppts/day-01-database-structures-data-logic.pptx
@@ -545,7 +545,7 @@
             </a:pPr>
             <a:r>
               <a:rPr/>
-              <a:t>Welcome to Week 5. The TCD becomes the spine. Today: data model your feature into TMD §1, defending choices by access pattern.</a:t>
+              <a:t>Welcome to Week 5. The TCD becomes the spine. Today: data model your feature into TMD Section 1, defending choices by access pattern.</a:t>
             </a:r>
           </a:p>
         </p:txBody>
@@ -709,7 +709,7 @@
             </a:pPr>
             <a:r>
               <a:rPr/>
-              <a:t>Note signature_hash + R-threat reference — TCD §3 (Day 2 of Week 4) STRIDE work pays off.</a:t>
+              <a:t>Note signature_hash + R-threat reference — TCD Section 3 (Day 2 of Week 4) STRIDE work pays off.</a:t>
             </a:r>
           </a:p>
         </p:txBody>
@@ -1447,7 +1447,7 @@
             </a:pPr>
             <a:r>
               <a:rPr/>
-              <a:t>By 16:00, every triad has TMD §1 — entities, indexes, trade-offs.</a:t>
+              <a:t>By 16:00, every triad has TMD Section 1 — entities, indexes, trade-offs.</a:t>
             </a:r>
           </a:p>
         </p:txBody>
@@ -5968,7 +5968,7 @@
             </a:pPr>
             <a:r>
               <a:rPr/>
-              <a:t>10 min: cross-check against TCD §4 SLOs</a:t>
+              <a:t>10 min: cross-check against TCD Section 4 SLOs</a:t>
             </a:r>
           </a:p>
           <a:p>
@@ -6099,7 +6099,7 @@
             </a:pPr>
             <a:r>
               <a:rPr/>
-              <a:t>🧿 Today’s Two Prompts</a:t>
+              <a:t>🤖 Today’s Two Prompts</a:t>
             </a:r>
           </a:p>
         </p:txBody>
@@ -6285,7 +6285,7 @@
             </a:pPr>
             <a:r>
               <a:rPr/>
-              <a:t>15 min: update §1 + provenance + AI-prose check</a:t>
+              <a:t>15 min: update Section 1 + provenance + AI-prose check</a:t>
             </a:r>
           </a:p>
           <a:p>
@@ -6402,7 +6402,7 @@
             </a:pPr>
             <a:r>
               <a:rPr/>
-              <a:t>TMD §1 drafted</a:t>
+              <a:t>TMD Section 1 drafted</a:t>
             </a:r>
           </a:p>
           <a:p>
@@ -6447,7 +6447,7 @@
             </a:pPr>
             <a:r>
               <a:rPr/>
-              <a:t>Bring to Day 2: Your TMD §1 + the TCD’s Container diagram. Tomorrow we put the boxes in regions.</a:t>
+              <a:t>Bring to Day 2: Your TMD Section 1 + the TCD’s Container diagram. Tomorrow we put the boxes in regions.</a:t>
             </a:r>
           </a:p>
         </p:txBody>
@@ -6630,7 +6630,7 @@
             </a:pPr>
             <a:r>
               <a:rPr/>
-              <a:t>Draft TMD §1 — Data model</a:t>
+              <a:t>Draft TMD Section 1 — Data model</a:t>
             </a:r>
           </a:p>
         </p:txBody>
@@ -6747,7 +6747,7 @@
             </a:pPr>
             <a:r>
               <a:rPr/>
-              <a:t>Pin TCD §§1–6 on the wall</a:t>
+              <a:t>Pin TCD Sections 1–6 on the wall</a:t>
             </a:r>
           </a:p>
           <a:p>
@@ -7509,7 +7509,7 @@
             </a:pPr>
             <a:r>
               <a:rPr/>
-              <a:t>5 min: re-read PRD §5</a:t>
+              <a:t>5 min: re-read PRD Section 5</a:t>
             </a:r>
           </a:p>
           <a:p>

--- a/week-05/presentations/ppts/day-01-database-structures-data-logic.pptx
+++ b/week-05/presentations/ppts/day-01-database-structures-data-logic.pptx
@@ -5474,6 +5474,15 @@
 - ticket_ids is denormalized (see trade-off #2)</a:t>
             </a:r>
           </a:p>
+          <a:p>
+            <a:pPr lvl="0" indent="0" marL="0">
+              <a:buNone/>
+            </a:pPr>
+            <a:r>
+              <a:rPr/>
+              <a:t>The signature_hash addresses the Repudiation threat in the STRIDE model (Spoofing, Tampering, Repudiation, Information disclosure, Denial of service, Elevation of privilege).</a:t>
+            </a:r>
+          </a:p>
         </p:txBody>
       </p:sp>
     </p:spTree>
@@ -5968,7 +5977,7 @@
             </a:pPr>
             <a:r>
               <a:rPr/>
-              <a:t>10 min: cross-check against TCD Section 4 SLOs</a:t>
+              <a:t>10 min: cross-check against Technical Concept Document (TCD) Section 4 Service Level Objectives (SLOs)</a:t>
             </a:r>
           </a:p>
           <a:p>
@@ -6630,7 +6639,7 @@
             </a:pPr>
             <a:r>
               <a:rPr/>
-              <a:t>Draft TMD Section 1 — Data model</a:t>
+              <a:t>Draft Technical Modeling Document (TMD) Section 1 — Data model</a:t>
             </a:r>
           </a:p>
         </p:txBody>
@@ -7509,7 +7518,7 @@
             </a:pPr>
             <a:r>
               <a:rPr/>
-              <a:t>5 min: re-read PRD Section 5</a:t>
+              <a:t>5 min: re-read Product Requirements Document (PRD) Section 5</a:t>
             </a:r>
           </a:p>
           <a:p>

--- a/week-05/presentations/ppts/day-01-database-structures-data-logic.pptx
+++ b/week-05/presentations/ppts/day-01-database-structures-data-logic.pptx
@@ -5880,6 +5880,47 @@
           </a:p>
         </p:txBody>
       </p:sp>
+      <p:sp>
+        <p:nvSpPr>
+          <p:cNvPr id="3" name="Content Placeholder 2"/>
+          <p:cNvSpPr>
+            <a:spLocks noGrp="1"/>
+          </p:cNvSpPr>
+          <p:nvPr>
+            <p:ph idx="1"/>
+          </p:nvPr>
+        </p:nvSpPr>
+        <p:spPr/>
+        <p:txBody>
+          <a:bodyPr/>
+          <a:lstStyle/>
+          <a:p>
+            <a:pPr lvl="0" indent="0">
+              <a:buNone/>
+            </a:pPr>
+            <a:r>
+              <a:rPr>
+                <a:latin typeface="Courier"/>
+              </a:rPr>
+              <a:t>### Trade-off — ticket_ids storage
+**Tension:** Normalization vs denormalization.
+**Option A:** ReconcileEvent.ticket_ids: UUID[] (denormalized).
+**Option B:** Separate ReconcileEventTicket join table.
+**Choice:** Option A.
+**Why:** Reconcile events are read in batches of 1 most of the
+time. Reading the array is one row. Option B requires
+a join. Reconcile events are immutable and rarely
+queried by ticket — access patterns don't reward
+normalization.
+**Accepted cost:** Cannot index by individual ticket_id (no
+"find every reconcile that touched ticket X" query
+without a denormalization).
+**Revisit trigger:** If "find reconciles touching ticket X"
+becomes a high-volume query.</a:t>
+            </a:r>
+          </a:p>
+        </p:txBody>
+      </p:sp>
     </p:spTree>
   </p:cSld>
 </p:sld>
@@ -6113,6 +6154,46 @@
           </a:p>
         </p:txBody>
       </p:sp>
+      <p:sp>
+        <p:nvSpPr>
+          <p:cNvPr id="3" name="Content Placeholder 2"/>
+          <p:cNvSpPr>
+            <a:spLocks noGrp="1"/>
+          </p:cNvSpPr>
+          <p:nvPr>
+            <p:ph idx="1"/>
+          </p:nvPr>
+        </p:nvSpPr>
+        <p:spPr/>
+        <p:txBody>
+          <a:bodyPr/>
+          <a:lstStyle/>
+          <a:p>
+            <a:pPr lvl="0" indent="0">
+              <a:buNone/>
+            </a:pPr>
+            <a:r>
+              <a:rPr>
+                <a:latin typeface="Courier"/>
+              </a:rPr>
+              <a:t>A. Critique this schema
+Role: Senior backend engineer reviewing a feature's data model.
+Context: &lt;entity definitions + indexes + relationships +
+access pattern sheet&gt;
+Task: Identify the top 3 issues.
+Constraints:
+- Name the specific access pattern or invariant that breaks
+- Suggest a concrete fix (new index / entity / cardinality)
+- Do not suggest generic best practices
+Format: Numbered — Issue / What breaks / Fix.
+B. What did we forget?
+Continuing from above. Given these access patterns, what queries
+the user will eventually want are NOT yet supported by this
+schema? List 3, ranked by likelihood within 6 months.</a:t>
+            </a:r>
+          </a:p>
+        </p:txBody>
+      </p:sp>
     </p:spTree>
   </p:cSld>
 </p:sld>
@@ -7290,7 +7371,7 @@
             </a:pPr>
             <a:r>
               <a:rPr/>
-              <a:t>Key-value (Redis, DynamoDB)</a:t>
+              <a:t>Key-value (Redis, Cosmos DB)</a:t>
             </a:r>
           </a:p>
           <a:p>

--- a/week-05/presentations/ppts/day-01-database-structures-data-logic.pptx
+++ b/week-05/presentations/ppts/day-01-database-structures-data-logic.pptx
@@ -627,7 +627,7 @@
             </a:pPr>
             <a:r>
               <a:rPr/>
-              <a:t>If a triad lists indexes without referencing patterns, they’re guessing.</a:t>
+              <a:t>If a quad lists indexes without referencing patterns, they’re guessing.</a:t>
             </a:r>
           </a:p>
         </p:txBody>
@@ -1365,7 +1365,7 @@
             </a:pPr>
             <a:r>
               <a:rPr/>
-              <a:t>Wrap-share: each triad names 1 trade-off, 1 AI-surfaced query, 1 question for the architect.</a:t>
+              <a:t>Wrap-share: each quad names 1 trade-off, 1 AI-surfaced query, 1 question for the architect.</a:t>
             </a:r>
           </a:p>
         </p:txBody>
@@ -1447,7 +1447,7 @@
             </a:pPr>
             <a:r>
               <a:rPr/>
-              <a:t>By 16:00, every triad has TMD Section 1 — entities, indexes, trade-offs.</a:t>
+              <a:t>By 16:00, every quad has TMD Section 1 — entities, indexes, trade-offs.</a:t>
             </a:r>
           </a:p>
         </p:txBody>
@@ -1775,7 +1775,7 @@
             </a:pPr>
             <a:r>
               <a:rPr/>
-              <a:t>Data modeling starts with queries, not entities. Force triads to enumerate reads and writes — and freshness claims — before any table gets drawn.</a:t>
+              <a:t>Data modeling starts with queries, not entities. Force quads to enumerate reads and writes — and freshness claims — before any table gets drawn.</a:t>
             </a:r>
           </a:p>
         </p:txBody>
@@ -1939,7 +1939,7 @@
             </a:pPr>
             <a:r>
               <a:rPr/>
-              <a:t>If a triad volunteers “let’s use Postgres” without describing access patterns, they’ve skipped the work.</a:t>
+              <a:t>If a quad volunteers “let’s use Postgres” without describing access patterns, they’ve skipped the work.</a:t>
             </a:r>
           </a:p>
         </p:txBody>
@@ -2103,7 +2103,7 @@
             </a:pPr>
             <a:r>
               <a:rPr/>
-              <a:t>“Real-time” freshness is rare in B2B. Force triads to defend “real-time” claims.</a:t>
+              <a:t>“Real-time” freshness is rare in B2B. Force quads to defend “real-time” claims.</a:t>
             </a:r>
           </a:p>
         </p:txBody>
@@ -2185,7 +2185,7 @@
             </a:pPr>
             <a:r>
               <a:rPr/>
-              <a:t>The discipline: every field must trace back to a query that uses it. Surprise columns are the tell that triads are designing from the schema side rather than the access side.</a:t>
+              <a:t>The discipline: every field must trace back to a query that uses it. Surprise columns are the tell that quads are designing from the schema side rather than the access side.</a:t>
             </a:r>
           </a:p>
         </p:txBody>
@@ -5555,7 +5555,7 @@
             </a:pPr>
             <a:r>
               <a:rPr b="1"/>
-              <a:t>Triads • 40 minutes</a:t>
+              <a:t>Quads • 40 minutes</a:t>
             </a:r>
           </a:p>
           <a:p>
@@ -5991,7 +5991,7 @@
             </a:pPr>
             <a:r>
               <a:rPr b="1"/>
-              <a:t>Triads • 40 minutes</a:t>
+              <a:t>Quads • 40 minutes</a:t>
             </a:r>
           </a:p>
           <a:p>
@@ -6339,7 +6339,7 @@
             </a:pPr>
             <a:r>
               <a:rPr b="1"/>
-              <a:t>Triads • 45 minutes • Wrap</a:t>
+              <a:t>Quads • 45 minutes • Wrap</a:t>
             </a:r>
           </a:p>
           <a:p>
@@ -7581,7 +7581,7 @@
             </a:pPr>
             <a:r>
               <a:rPr b="1"/>
-              <a:t>Triads • 35 minutes</a:t>
+              <a:t>Quads • 35 minutes</a:t>
             </a:r>
           </a:p>
           <a:p>

--- a/week-05/presentations/ppts/day-01-database-structures-data-logic.pptx
+++ b/week-05/presentations/ppts/day-01-database-structures-data-logic.pptx
@@ -5555,7 +5555,7 @@
             </a:pPr>
             <a:r>
               <a:rPr b="1"/>
-              <a:t>Quads • 40 minutes</a:t>
+              <a:t>Quads • 50 minutes</a:t>
             </a:r>
           </a:p>
           <a:p>
@@ -5991,7 +5991,7 @@
             </a:pPr>
             <a:r>
               <a:rPr b="1"/>
-              <a:t>Quads • 40 minutes</a:t>
+              <a:t>Quads • 50 minutes</a:t>
             </a:r>
           </a:p>
           <a:p>
@@ -6339,7 +6339,7 @@
             </a:pPr>
             <a:r>
               <a:rPr b="1"/>
-              <a:t>Quads • 45 minutes • Wrap</a:t>
+              <a:t>Quads • 55 minutes • Wrap</a:t>
             </a:r>
           </a:p>
           <a:p>
@@ -7581,7 +7581,7 @@
             </a:pPr>
             <a:r>
               <a:rPr b="1"/>
-              <a:t>Quads • 35 minutes</a:t>
+              <a:t>Quads • 45 minutes</a:t>
             </a:r>
           </a:p>
           <a:p>

--- a/week-05/presentations/ppts/day-01-database-structures-data-logic.pptx
+++ b/week-05/presentations/ppts/day-01-database-structures-data-logic.pptx
@@ -5582,7 +5582,7 @@
             </a:pPr>
             <a:r>
               <a:rPr/>
-              <a:t>15 min: draft fields per new entity</a:t>
+              <a:t>25 min: draft fields per new entity</a:t>
             </a:r>
           </a:p>
           <a:p>
@@ -5609,7 +5609,7 @@
             </a:pPr>
             <a:r>
               <a:rPr/>
-              <a:t>⏱ 10 + 15 + 10 + 5</a:t>
+              <a:t>⏱ 10 + 25 + 10 + 5</a:t>
             </a:r>
           </a:p>
         </p:txBody>
@@ -6000,7 +6000,7 @@
             </a:pPr>
             <a:r>
               <a:rPr/>
-              <a:t>15 min: identify 3 trade-off points in your model</a:t>
+              <a:t>25 min: identify 3 trade-off points in your model</a:t>
             </a:r>
           </a:p>
           <a:p>
@@ -6027,7 +6027,7 @@
             </a:pPr>
             <a:r>
               <a:rPr/>
-              <a:t>⏱ 15 + 15 + 10</a:t>
+              <a:t>⏱ 25 + 15 + 10</a:t>
             </a:r>
           </a:p>
         </p:txBody>
@@ -6375,16 +6375,16 @@
             </a:pPr>
             <a:r>
               <a:rPr/>
-              <a:t>15 min: update Section 1 + provenance + AI-prose check</a:t>
-            </a:r>
-          </a:p>
-          <a:p>
-            <a:pPr lvl="0" indent="0" marL="0">
-              <a:buNone/>
-            </a:pPr>
-            <a:r>
-              <a:rPr/>
-              <a:t>⏱ 10 + 10 + 10 + 15 · 15-min wrap</a:t>
+              <a:t>25 min: update Section 1 + provenance + AI-prose check</a:t>
+            </a:r>
+          </a:p>
+          <a:p>
+            <a:pPr lvl="0" indent="0" marL="0">
+              <a:buNone/>
+            </a:pPr>
+            <a:r>
+              <a:rPr/>
+              <a:t>⏱ 10 + 10 + 10 + 25 · 15-min wrap</a:t>
             </a:r>
           </a:p>
         </p:txBody>
@@ -7608,7 +7608,7 @@
             </a:pPr>
             <a:r>
               <a:rPr/>
-              <a:t>15 min: list reads (data, filter, freshness)</a:t>
+              <a:t>25 min: list reads (data, filter, freshness)</a:t>
             </a:r>
           </a:p>
           <a:p>
@@ -7635,7 +7635,7 @@
             </a:pPr>
             <a:r>
               <a:rPr/>
-              <a:t>⏱ 5 + 15 + 10 + 5</a:t>
+              <a:t>⏱ 5 + 25 + 10 + 5</a:t>
             </a:r>
           </a:p>
         </p:txBody>
